--- a/Task-4 Data Storytelling & Statistical Validation/Power Point presentation/Data Storytelling & Statistical Validation.pptx
+++ b/Task-4 Data Storytelling & Statistical Validation/Power Point presentation/Data Storytelling & Statistical Validation.pptx
@@ -115,6 +115,11 @@
       </a:defRPr>
     </a:lvl9pPr>
   </p:defaultTextStyle>
+  <p:extLst>
+    <p:ext uri="{EFAFB233-063F-42B5-8137-9DF3F51BA10A}">
+      <p15:sldGuideLst xmlns:p15="http://schemas.microsoft.com/office/powerpoint/2012/main"/>
+    </p:ext>
+  </p:extLst>
 </p:presentation>
 </file>
 
@@ -378,7 +383,7 @@
           <a:p>
             <a:fld id="{C6B78E69-29D9-4187-9215-DB3761A071AC}" type="datetimeFigureOut">
               <a:rPr lang="en-US" smtClean="0"/>
-              <a:t>7/22/2026</a:t>
+              <a:t>8/11/2026</a:t>
             </a:fld>
             <a:endParaRPr lang="en-US"/>
           </a:p>
@@ -576,7 +581,7 @@
           <a:p>
             <a:fld id="{C6B78E69-29D9-4187-9215-DB3761A071AC}" type="datetimeFigureOut">
               <a:rPr lang="en-US" smtClean="0"/>
-              <a:t>7/22/2026</a:t>
+              <a:t>8/11/2026</a:t>
             </a:fld>
             <a:endParaRPr lang="en-US"/>
           </a:p>
@@ -784,7 +789,7 @@
           <a:p>
             <a:fld id="{C6B78E69-29D9-4187-9215-DB3761A071AC}" type="datetimeFigureOut">
               <a:rPr lang="en-US" smtClean="0"/>
-              <a:t>7/22/2026</a:t>
+              <a:t>8/11/2026</a:t>
             </a:fld>
             <a:endParaRPr lang="en-US"/>
           </a:p>
@@ -982,7 +987,7 @@
           <a:p>
             <a:fld id="{C6B78E69-29D9-4187-9215-DB3761A071AC}" type="datetimeFigureOut">
               <a:rPr lang="en-US" smtClean="0"/>
-              <a:t>7/22/2026</a:t>
+              <a:t>8/11/2026</a:t>
             </a:fld>
             <a:endParaRPr lang="en-US"/>
           </a:p>
@@ -1257,7 +1262,7 @@
           <a:p>
             <a:fld id="{C6B78E69-29D9-4187-9215-DB3761A071AC}" type="datetimeFigureOut">
               <a:rPr lang="en-US" smtClean="0"/>
-              <a:t>7/22/2026</a:t>
+              <a:t>8/11/2026</a:t>
             </a:fld>
             <a:endParaRPr lang="en-US"/>
           </a:p>
@@ -1522,7 +1527,7 @@
           <a:p>
             <a:fld id="{C6B78E69-29D9-4187-9215-DB3761A071AC}" type="datetimeFigureOut">
               <a:rPr lang="en-US" smtClean="0"/>
-              <a:t>7/22/2026</a:t>
+              <a:t>8/11/2026</a:t>
             </a:fld>
             <a:endParaRPr lang="en-US"/>
           </a:p>
@@ -1934,7 +1939,7 @@
           <a:p>
             <a:fld id="{C6B78E69-29D9-4187-9215-DB3761A071AC}" type="datetimeFigureOut">
               <a:rPr lang="en-US" smtClean="0"/>
-              <a:t>7/22/2026</a:t>
+              <a:t>8/11/2026</a:t>
             </a:fld>
             <a:endParaRPr lang="en-US"/>
           </a:p>
@@ -2075,7 +2080,7 @@
           <a:p>
             <a:fld id="{C6B78E69-29D9-4187-9215-DB3761A071AC}" type="datetimeFigureOut">
               <a:rPr lang="en-US" smtClean="0"/>
-              <a:t>7/22/2026</a:t>
+              <a:t>8/11/2026</a:t>
             </a:fld>
             <a:endParaRPr lang="en-US"/>
           </a:p>
@@ -2188,7 +2193,7 @@
           <a:p>
             <a:fld id="{C6B78E69-29D9-4187-9215-DB3761A071AC}" type="datetimeFigureOut">
               <a:rPr lang="en-US" smtClean="0"/>
-              <a:t>7/22/2026</a:t>
+              <a:t>8/11/2026</a:t>
             </a:fld>
             <a:endParaRPr lang="en-US"/>
           </a:p>
@@ -2499,7 +2504,7 @@
           <a:p>
             <a:fld id="{C6B78E69-29D9-4187-9215-DB3761A071AC}" type="datetimeFigureOut">
               <a:rPr lang="en-US" smtClean="0"/>
-              <a:t>7/22/2026</a:t>
+              <a:t>8/11/2026</a:t>
             </a:fld>
             <a:endParaRPr lang="en-US"/>
           </a:p>
@@ -2787,7 +2792,7 @@
           <a:p>
             <a:fld id="{C6B78E69-29D9-4187-9215-DB3761A071AC}" type="datetimeFigureOut">
               <a:rPr lang="en-US" smtClean="0"/>
-              <a:t>7/22/2026</a:t>
+              <a:t>8/11/2026</a:t>
             </a:fld>
             <a:endParaRPr lang="en-US"/>
           </a:p>
@@ -3028,7 +3033,7 @@
           <a:p>
             <a:fld id="{C6B78E69-29D9-4187-9215-DB3761A071AC}" type="datetimeFigureOut">
               <a:rPr lang="en-US" smtClean="0"/>
-              <a:t>7/22/2026</a:t>
+              <a:t>8/11/2026</a:t>
             </a:fld>
             <a:endParaRPr lang="en-US"/>
           </a:p>
@@ -3555,7 +3560,7 @@
                 <a:latin typeface="Times New Roman" panose="02020603050405020304" pitchFamily="18" charset="0"/>
                 <a:cs typeface="Times New Roman" panose="02020603050405020304" pitchFamily="18" charset="0"/>
               </a:rPr>
-              <a:t>M. Hema Latha</a:t>
+              <a:t>M. Sirisha</a:t>
             </a:r>
           </a:p>
           <a:p>
